--- a/dist/초3/수학/자연수계산/초3_수학_자연수계산_03_나눗셈의뜻.pptx
+++ b/dist/초3/수학/자연수계산/초3_수학_자연수계산_03_나눗셈의뜻.pptx
@@ -121,13 +121,13 @@
   <p:extLst>
     <p:ext uri="{521415D9-36F7-43E2-AB2F-B90AF26B5E84}">
       <p14:sectionLst xmlns:p14="http://schemas.microsoft.com/office/powerpoint/2010/main">
-        <p14:section name="도입" id="{dbb42d89-823d-9591-63ec-ef993d7afbe6}">
+        <p14:section name="도입" id="{56519f1d-76a1-1ee8-bfa1-72f2bd596802}">
           <p14:sldIdLst>
             <p14:sldId id="256"/>
             <p14:sldId id="257"/>
           </p14:sldIdLst>
         </p14:section>
-        <p14:section name="개념" id="{f2eb8ffa-c37f-10d7-fe25-8a2000b1b106}">
+        <p14:section name="개념" id="{860a7132-302a-8b59-fef3-e41d86585ead}">
           <p14:sldIdLst>
             <p14:sldId id="258"/>
             <p14:sldId id="259"/>
@@ -136,32 +136,32 @@
             <p14:sldId id="264"/>
           </p14:sldIdLst>
         </p14:section>
-        <p14:section name="연습" id="{ffc083bb-c7df-2b7f-a1b0-72dd96dcf1c1}">
+        <p14:section name="연습" id="{46fc7fc3-0a24-20f3-7dac-25fbb26769fa}">
           <p14:sldIdLst>
             <p14:sldId id="262"/>
             <p14:sldId id="263"/>
             <p14:sldId id="265"/>
           </p14:sldIdLst>
         </p14:section>
-        <p14:section name="개념" id="{12961749-638a-ee86-a2b2-3aafdcb38e4c}">
+        <p14:section name="개념" id="{090bfd49-13c4-99c6-4a5a-f17bd2095ca8}">
           <p14:sldIdLst/>
         </p14:section>
-        <p14:section name="연습" id="{ff1d2404-513d-9546-a89f-569fddcd8d55}">
+        <p14:section name="연습" id="{d5fcd970-7f87-0df0-19e5-514646c404b9}">
           <p14:sldIdLst/>
         </p14:section>
-        <p14:section name="확인" id="{b6e95896-f3b0-b82e-01ba-120ceb034c50}">
+        <p14:section name="확인" id="{ca19436c-afaf-3f63-fbd3-53e409e46e1e}">
           <p14:sldIdLst>
             <p14:sldId id="266"/>
             <p14:sldId id="267"/>
             <p14:sldId id="268"/>
           </p14:sldIdLst>
         </p14:section>
-        <p14:section name="정리" id="{09bb10d4-b419-d95c-95f8-b330f023836a}">
+        <p14:section name="정리" id="{c7b4057a-d14a-976c-261d-03c70cefffd7}">
           <p14:sldIdLst>
             <p14:sldId id="269"/>
           </p14:sldIdLst>
         </p14:section>
-        <p14:section name="보충" id="{1c433d71-80f0-384a-d127-65e4f954e44f}">
+        <p14:section name="보충" id="{00438c73-9dd9-8744-490c-6196be325785}">
           <p14:sldIdLst>
             <p14:sldId id="270"/>
           </p14:sldIdLst>

--- a/dist/초3/수학/자연수계산/초3_수학_자연수계산_03_나눗셈의뜻.pptx
+++ b/dist/초3/수학/자연수계산/초3_수학_자연수계산_03_나눗셈의뜻.pptx
@@ -121,13 +121,13 @@
   <p:extLst>
     <p:ext uri="{521415D9-36F7-43E2-AB2F-B90AF26B5E84}">
       <p14:sectionLst xmlns:p14="http://schemas.microsoft.com/office/powerpoint/2010/main">
-        <p14:section name="도입" id="{56519f1d-76a1-1ee8-bfa1-72f2bd596802}">
+        <p14:section name="도입" id="{8b79ed1c-37e7-da08-28e6-22d173effcde}">
           <p14:sldIdLst>
             <p14:sldId id="256"/>
             <p14:sldId id="257"/>
           </p14:sldIdLst>
         </p14:section>
-        <p14:section name="개념" id="{860a7132-302a-8b59-fef3-e41d86585ead}">
+        <p14:section name="개념" id="{ff302fe7-d2ad-27a9-3032-892a06158e15}">
           <p14:sldIdLst>
             <p14:sldId id="258"/>
             <p14:sldId id="259"/>
@@ -136,32 +136,32 @@
             <p14:sldId id="264"/>
           </p14:sldIdLst>
         </p14:section>
-        <p14:section name="연습" id="{46fc7fc3-0a24-20f3-7dac-25fbb26769fa}">
+        <p14:section name="연습" id="{1f9abb45-bf09-4e59-6422-472419071db5}">
           <p14:sldIdLst>
             <p14:sldId id="262"/>
             <p14:sldId id="263"/>
             <p14:sldId id="265"/>
           </p14:sldIdLst>
         </p14:section>
-        <p14:section name="개념" id="{090bfd49-13c4-99c6-4a5a-f17bd2095ca8}">
+        <p14:section name="개념" id="{bb8c7957-33a7-1e88-4640-9bd609ef8676}">
           <p14:sldIdLst/>
         </p14:section>
-        <p14:section name="연습" id="{d5fcd970-7f87-0df0-19e5-514646c404b9}">
+        <p14:section name="연습" id="{cf276fc7-f4ef-0861-ff81-66d3143614be}">
           <p14:sldIdLst/>
         </p14:section>
-        <p14:section name="확인" id="{ca19436c-afaf-3f63-fbd3-53e409e46e1e}">
+        <p14:section name="확인" id="{50e9c2d0-9dac-01bd-6cad-186b7a0a597d}">
           <p14:sldIdLst>
             <p14:sldId id="266"/>
             <p14:sldId id="267"/>
             <p14:sldId id="268"/>
           </p14:sldIdLst>
         </p14:section>
-        <p14:section name="정리" id="{c7b4057a-d14a-976c-261d-03c70cefffd7}">
+        <p14:section name="정리" id="{7d60568f-a1cc-cd3a-fa78-2af7f95bfacd}">
           <p14:sldIdLst>
             <p14:sldId id="269"/>
           </p14:sldIdLst>
         </p14:section>
-        <p14:section name="보충" id="{00438c73-9dd9-8744-490c-6196be325785}">
+        <p14:section name="보충" id="{5aa73f23-569c-14ac-af21-fc5f2102ffd0}">
           <p14:sldIdLst>
             <p14:sldId id="270"/>
           </p14:sldIdLst>

--- a/dist/초3/수학/자연수계산/초3_수학_자연수계산_03_나눗셈의뜻.pptx
+++ b/dist/초3/수학/자연수계산/초3_수학_자연수계산_03_나눗셈의뜻.pptx
@@ -121,13 +121,13 @@
   <p:extLst>
     <p:ext uri="{521415D9-36F7-43E2-AB2F-B90AF26B5E84}">
       <p14:sectionLst xmlns:p14="http://schemas.microsoft.com/office/powerpoint/2010/main">
-        <p14:section name="도입" id="{8b79ed1c-37e7-da08-28e6-22d173effcde}">
+        <p14:section name="도입" id="{4ca3fcf3-9ec5-f102-2f64-4b08386cc81c}">
           <p14:sldIdLst>
             <p14:sldId id="256"/>
             <p14:sldId id="257"/>
           </p14:sldIdLst>
         </p14:section>
-        <p14:section name="개념" id="{ff302fe7-d2ad-27a9-3032-892a06158e15}">
+        <p14:section name="개념" id="{cc9c214e-ebf9-4601-ee63-c8bfaeeee3bb}">
           <p14:sldIdLst>
             <p14:sldId id="258"/>
             <p14:sldId id="259"/>
@@ -136,32 +136,32 @@
             <p14:sldId id="264"/>
           </p14:sldIdLst>
         </p14:section>
-        <p14:section name="연습" id="{1f9abb45-bf09-4e59-6422-472419071db5}">
+        <p14:section name="연습" id="{45dbb4a8-74b1-aacc-659f-d39237db2c4e}">
           <p14:sldIdLst>
             <p14:sldId id="262"/>
             <p14:sldId id="263"/>
             <p14:sldId id="265"/>
           </p14:sldIdLst>
         </p14:section>
-        <p14:section name="개념" id="{bb8c7957-33a7-1e88-4640-9bd609ef8676}">
+        <p14:section name="개념" id="{6619ba98-06d0-f9a5-e529-2a184254c117}">
           <p14:sldIdLst/>
         </p14:section>
-        <p14:section name="연습" id="{cf276fc7-f4ef-0861-ff81-66d3143614be}">
+        <p14:section name="연습" id="{aed121b0-3e03-68df-3ea6-083eea9afe58}">
           <p14:sldIdLst/>
         </p14:section>
-        <p14:section name="확인" id="{50e9c2d0-9dac-01bd-6cad-186b7a0a597d}">
+        <p14:section name="확인" id="{de91bf56-74d5-f6fb-f082-380101d9a189}">
           <p14:sldIdLst>
             <p14:sldId id="266"/>
             <p14:sldId id="267"/>
             <p14:sldId id="268"/>
           </p14:sldIdLst>
         </p14:section>
-        <p14:section name="정리" id="{7d60568f-a1cc-cd3a-fa78-2af7f95bfacd}">
+        <p14:section name="정리" id="{7233e328-17f3-adc8-0051-13db1a876c68}">
           <p14:sldIdLst>
             <p14:sldId id="269"/>
           </p14:sldIdLst>
         </p14:section>
-        <p14:section name="보충" id="{5aa73f23-569c-14ac-af21-fc5f2102ffd0}">
+        <p14:section name="보충" id="{9bdaf2a3-0043-470b-5531-ca36cc5d11c5}">
           <p14:sldIdLst>
             <p14:sldId id="270"/>
           </p14:sldIdLst>
